--- a/slides/3_advanced.pptx
+++ b/slides/3_advanced.pptx
@@ -499,7 +499,7 @@
           <a:p>
             <a:fld id="{506E0FD1-891F-4B1E-916D-E9B585160BB8}" type="datetimeFigureOut">
               <a:rPr lang="en-GB" smtClean="0"/>
-              <a:t>03/03/2026</a:t>
+              <a:t>05/03/2026</a:t>
             </a:fld>
             <a:endParaRPr lang="en-GB"/>
           </a:p>
@@ -916,7 +916,7 @@
           <a:p>
             <a:fld id="{D68C3F22-27B2-44E3-9C5F-D08126455F6F}" type="datetime1">
               <a:rPr lang="en-GB" smtClean="0"/>
-              <a:t>03/03/2026</a:t>
+              <a:t>05/03/2026</a:t>
             </a:fld>
             <a:endParaRPr lang="en-GB"/>
           </a:p>
@@ -1116,7 +1116,7 @@
           <a:p>
             <a:fld id="{1CD03846-7BF6-4FB6-A921-FF3379ADBD4C}" type="datetime1">
               <a:rPr lang="en-GB" smtClean="0"/>
-              <a:t>03/03/2026</a:t>
+              <a:t>05/03/2026</a:t>
             </a:fld>
             <a:endParaRPr lang="en-GB"/>
           </a:p>
@@ -1326,7 +1326,7 @@
           <a:p>
             <a:fld id="{99E1B91A-3FD0-4144-9C84-63E9688ED2FE}" type="datetime1">
               <a:rPr lang="en-GB" smtClean="0"/>
-              <a:t>03/03/2026</a:t>
+              <a:t>05/03/2026</a:t>
             </a:fld>
             <a:endParaRPr lang="en-GB"/>
           </a:p>
@@ -1526,7 +1526,7 @@
           <a:p>
             <a:fld id="{5295ED7B-FEAD-4734-819F-93EF4B0EA908}" type="datetime1">
               <a:rPr lang="en-GB" smtClean="0"/>
-              <a:t>03/03/2026</a:t>
+              <a:t>05/03/2026</a:t>
             </a:fld>
             <a:endParaRPr lang="en-GB"/>
           </a:p>
@@ -1802,7 +1802,7 @@
           <a:p>
             <a:fld id="{D2D5D4B4-C926-4B45-8815-1ED8911179A2}" type="datetime1">
               <a:rPr lang="en-GB" smtClean="0"/>
-              <a:t>03/03/2026</a:t>
+              <a:t>05/03/2026</a:t>
             </a:fld>
             <a:endParaRPr lang="en-GB"/>
           </a:p>
@@ -2070,7 +2070,7 @@
           <a:p>
             <a:fld id="{B4C5210A-0E37-4935-93AF-69F21A5F712F}" type="datetime1">
               <a:rPr lang="en-GB" smtClean="0"/>
-              <a:t>03/03/2026</a:t>
+              <a:t>05/03/2026</a:t>
             </a:fld>
             <a:endParaRPr lang="en-GB"/>
           </a:p>
@@ -2485,7 +2485,7 @@
           <a:p>
             <a:fld id="{3D3A6B2F-436C-4691-80E8-9C890E000E9D}" type="datetime1">
               <a:rPr lang="en-GB" smtClean="0"/>
-              <a:t>03/03/2026</a:t>
+              <a:t>05/03/2026</a:t>
             </a:fld>
             <a:endParaRPr lang="en-GB"/>
           </a:p>
@@ -2627,7 +2627,7 @@
           <a:p>
             <a:fld id="{84385F4C-D74B-496F-8D21-97E3549C783B}" type="datetime1">
               <a:rPr lang="en-GB" smtClean="0"/>
-              <a:t>03/03/2026</a:t>
+              <a:t>05/03/2026</a:t>
             </a:fld>
             <a:endParaRPr lang="en-GB"/>
           </a:p>
@@ -2740,7 +2740,7 @@
           <a:p>
             <a:fld id="{0CBDCB32-C241-4703-A832-4EB47BD54E83}" type="datetime1">
               <a:rPr lang="en-GB" smtClean="0"/>
-              <a:t>03/03/2026</a:t>
+              <a:t>05/03/2026</a:t>
             </a:fld>
             <a:endParaRPr lang="en-GB"/>
           </a:p>
@@ -3053,7 +3053,7 @@
           <a:p>
             <a:fld id="{85C150FF-BE95-4D25-A16A-E368A81CBF24}" type="datetime1">
               <a:rPr lang="en-GB" smtClean="0"/>
-              <a:t>03/03/2026</a:t>
+              <a:t>05/03/2026</a:t>
             </a:fld>
             <a:endParaRPr lang="en-GB"/>
           </a:p>
@@ -3342,7 +3342,7 @@
           <a:p>
             <a:fld id="{F3C5DB4B-B349-43C9-A424-BADA723AD9F1}" type="datetime1">
               <a:rPr lang="en-GB" smtClean="0"/>
-              <a:t>03/03/2026</a:t>
+              <a:t>05/03/2026</a:t>
             </a:fld>
             <a:endParaRPr lang="en-GB"/>
           </a:p>
@@ -3585,7 +3585,7 @@
           <a:p>
             <a:fld id="{12632426-0A0C-405F-A3D0-2D11AA44702A}" type="datetime1">
               <a:rPr lang="en-GB" smtClean="0"/>
-              <a:t>03/03/2026</a:t>
+              <a:t>05/03/2026</a:t>
             </a:fld>
             <a:endParaRPr lang="en-GB"/>
           </a:p>
@@ -6127,7 +6127,26 @@
           <a:bodyPr/>
           <a:lstStyle/>
           <a:p>
-            <a:endParaRPr lang="de-DE"/>
+            <a:r>
+              <a:rPr lang="de-DE" dirty="0"/>
+              <a:t>Idea </a:t>
+            </a:r>
+            <a:r>
+              <a:rPr lang="de-DE" dirty="0" err="1"/>
+              <a:t>of</a:t>
+            </a:r>
+            <a:r>
+              <a:rPr lang="de-DE" dirty="0"/>
+              <a:t> </a:t>
+            </a:r>
+            <a:r>
+              <a:rPr lang="de-DE" dirty="0" err="1"/>
+              <a:t>the</a:t>
+            </a:r>
+            <a:r>
+              <a:rPr lang="de-DE" dirty="0"/>
+              <a:t> Chapter</a:t>
+            </a:r>
           </a:p>
         </p:txBody>
       </p:sp>

--- a/slides/3_advanced.pptx
+++ b/slides/3_advanced.pptx
@@ -5,7 +5,7 @@
     <p:sldMasterId id="2147483648" r:id="rId1"/>
   </p:sldMasterIdLst>
   <p:notesMasterIdLst>
-    <p:notesMasterId r:id="rId23"/>
+    <p:notesMasterId r:id="rId24"/>
   </p:notesMasterIdLst>
   <p:sldIdLst>
     <p:sldId id="256" r:id="rId2"/>
@@ -24,11 +24,12 @@
     <p:sldId id="858" r:id="rId15"/>
     <p:sldId id="868" r:id="rId16"/>
     <p:sldId id="857" r:id="rId17"/>
-    <p:sldId id="869" r:id="rId18"/>
-    <p:sldId id="271" r:id="rId19"/>
-    <p:sldId id="859" r:id="rId20"/>
-    <p:sldId id="567" r:id="rId21"/>
-    <p:sldId id="865" r:id="rId22"/>
+    <p:sldId id="870" r:id="rId18"/>
+    <p:sldId id="869" r:id="rId19"/>
+    <p:sldId id="271" r:id="rId20"/>
+    <p:sldId id="859" r:id="rId21"/>
+    <p:sldId id="567" r:id="rId22"/>
+    <p:sldId id="865" r:id="rId23"/>
   </p:sldIdLst>
   <p:sldSz cx="12192000" cy="6858000"/>
   <p:notesSz cx="6858000" cy="9144000"/>
@@ -499,7 +500,7 @@
           <a:p>
             <a:fld id="{506E0FD1-891F-4B1E-916D-E9B585160BB8}" type="datetimeFigureOut">
               <a:rPr lang="en-GB" smtClean="0"/>
-              <a:t>05/03/2026</a:t>
+              <a:t>11/04/2026</a:t>
             </a:fld>
             <a:endParaRPr lang="en-GB"/>
           </a:p>
@@ -916,7 +917,7 @@
           <a:p>
             <a:fld id="{D68C3F22-27B2-44E3-9C5F-D08126455F6F}" type="datetime1">
               <a:rPr lang="en-GB" smtClean="0"/>
-              <a:t>05/03/2026</a:t>
+              <a:t>11/04/2026</a:t>
             </a:fld>
             <a:endParaRPr lang="en-GB"/>
           </a:p>
@@ -1116,7 +1117,7 @@
           <a:p>
             <a:fld id="{1CD03846-7BF6-4FB6-A921-FF3379ADBD4C}" type="datetime1">
               <a:rPr lang="en-GB" smtClean="0"/>
-              <a:t>05/03/2026</a:t>
+              <a:t>11/04/2026</a:t>
             </a:fld>
             <a:endParaRPr lang="en-GB"/>
           </a:p>
@@ -1326,7 +1327,7 @@
           <a:p>
             <a:fld id="{99E1B91A-3FD0-4144-9C84-63E9688ED2FE}" type="datetime1">
               <a:rPr lang="en-GB" smtClean="0"/>
-              <a:t>05/03/2026</a:t>
+              <a:t>11/04/2026</a:t>
             </a:fld>
             <a:endParaRPr lang="en-GB"/>
           </a:p>
@@ -1526,7 +1527,7 @@
           <a:p>
             <a:fld id="{5295ED7B-FEAD-4734-819F-93EF4B0EA908}" type="datetime1">
               <a:rPr lang="en-GB" smtClean="0"/>
-              <a:t>05/03/2026</a:t>
+              <a:t>11/04/2026</a:t>
             </a:fld>
             <a:endParaRPr lang="en-GB"/>
           </a:p>
@@ -1802,7 +1803,7 @@
           <a:p>
             <a:fld id="{D2D5D4B4-C926-4B45-8815-1ED8911179A2}" type="datetime1">
               <a:rPr lang="en-GB" smtClean="0"/>
-              <a:t>05/03/2026</a:t>
+              <a:t>11/04/2026</a:t>
             </a:fld>
             <a:endParaRPr lang="en-GB"/>
           </a:p>
@@ -2070,7 +2071,7 @@
           <a:p>
             <a:fld id="{B4C5210A-0E37-4935-93AF-69F21A5F712F}" type="datetime1">
               <a:rPr lang="en-GB" smtClean="0"/>
-              <a:t>05/03/2026</a:t>
+              <a:t>11/04/2026</a:t>
             </a:fld>
             <a:endParaRPr lang="en-GB"/>
           </a:p>
@@ -2485,7 +2486,7 @@
           <a:p>
             <a:fld id="{3D3A6B2F-436C-4691-80E8-9C890E000E9D}" type="datetime1">
               <a:rPr lang="en-GB" smtClean="0"/>
-              <a:t>05/03/2026</a:t>
+              <a:t>11/04/2026</a:t>
             </a:fld>
             <a:endParaRPr lang="en-GB"/>
           </a:p>
@@ -2627,7 +2628,7 @@
           <a:p>
             <a:fld id="{84385F4C-D74B-496F-8D21-97E3549C783B}" type="datetime1">
               <a:rPr lang="en-GB" smtClean="0"/>
-              <a:t>05/03/2026</a:t>
+              <a:t>11/04/2026</a:t>
             </a:fld>
             <a:endParaRPr lang="en-GB"/>
           </a:p>
@@ -2740,7 +2741,7 @@
           <a:p>
             <a:fld id="{0CBDCB32-C241-4703-A832-4EB47BD54E83}" type="datetime1">
               <a:rPr lang="en-GB" smtClean="0"/>
-              <a:t>05/03/2026</a:t>
+              <a:t>11/04/2026</a:t>
             </a:fld>
             <a:endParaRPr lang="en-GB"/>
           </a:p>
@@ -3053,7 +3054,7 @@
           <a:p>
             <a:fld id="{85C150FF-BE95-4D25-A16A-E368A81CBF24}" type="datetime1">
               <a:rPr lang="en-GB" smtClean="0"/>
-              <a:t>05/03/2026</a:t>
+              <a:t>11/04/2026</a:t>
             </a:fld>
             <a:endParaRPr lang="en-GB"/>
           </a:p>
@@ -3342,7 +3343,7 @@
           <a:p>
             <a:fld id="{F3C5DB4B-B349-43C9-A424-BADA723AD9F1}" type="datetime1">
               <a:rPr lang="en-GB" smtClean="0"/>
-              <a:t>05/03/2026</a:t>
+              <a:t>11/04/2026</a:t>
             </a:fld>
             <a:endParaRPr lang="en-GB"/>
           </a:p>
@@ -3585,7 +3586,7 @@
           <a:p>
             <a:fld id="{12632426-0A0C-405F-A3D0-2D11AA44702A}" type="datetime1">
               <a:rPr lang="en-GB" smtClean="0"/>
-              <a:t>05/03/2026</a:t>
+              <a:t>11/04/2026</a:t>
             </a:fld>
             <a:endParaRPr lang="en-GB"/>
           </a:p>
@@ -5610,7 +5611,7 @@
           <p:cNvPr id="2" name="Titel 1">
             <a:extLst>
               <a:ext uri="{FF2B5EF4-FFF2-40B4-BE49-F238E27FC236}">
-                <a16:creationId xmlns:a16="http://schemas.microsoft.com/office/drawing/2014/main" id="{9728D84D-0315-CC40-03E4-0D67C66A8EAA}"/>
+                <a16:creationId xmlns:a16="http://schemas.microsoft.com/office/drawing/2014/main" id="{3638C6F0-EEAA-7DD3-F1D2-34D4F5F17A5D}"/>
               </a:ext>
             </a:extLst>
           </p:cNvPr>
@@ -5628,15 +5629,7 @@
           <a:p>
             <a:r>
               <a:rPr lang="de-DE" dirty="0"/>
-              <a:t>Sim-</a:t>
-            </a:r>
-            <a:r>
-              <a:rPr lang="de-DE" dirty="0" err="1"/>
-              <a:t>to</a:t>
-            </a:r>
-            <a:r>
-              <a:rPr lang="de-DE" dirty="0"/>
-              <a:t>-Real Gap</a:t>
+              <a:t>Isaac Sim &amp; Lab</a:t>
             </a:r>
           </a:p>
         </p:txBody>
@@ -5646,7 +5639,7 @@
           <p:cNvPr id="3" name="Inhaltsplatzhalter 2">
             <a:extLst>
               <a:ext uri="{FF2B5EF4-FFF2-40B4-BE49-F238E27FC236}">
-                <a16:creationId xmlns:a16="http://schemas.microsoft.com/office/drawing/2014/main" id="{69AFEC59-CB1E-7792-3404-78A3B93E229C}"/>
+                <a16:creationId xmlns:a16="http://schemas.microsoft.com/office/drawing/2014/main" id="{56AB4563-14C8-A40B-C7FB-7CA27C97201F}"/>
               </a:ext>
             </a:extLst>
           </p:cNvPr>
@@ -5671,7 +5664,7 @@
           <p:cNvPr id="4" name="Foliennummernplatzhalter 3">
             <a:extLst>
               <a:ext uri="{FF2B5EF4-FFF2-40B4-BE49-F238E27FC236}">
-                <a16:creationId xmlns:a16="http://schemas.microsoft.com/office/drawing/2014/main" id="{629AC89E-FE0F-BB39-BE49-90F4B5A47D06}"/>
+                <a16:creationId xmlns:a16="http://schemas.microsoft.com/office/drawing/2014/main" id="{5AD6968C-F452-BA18-653A-B2E00C905166}"/>
               </a:ext>
             </a:extLst>
           </p:cNvPr>
@@ -5698,7 +5691,7 @@
     </p:spTree>
     <p:extLst>
       <p:ext uri="{BB962C8B-B14F-4D97-AF65-F5344CB8AC3E}">
-        <p14:creationId xmlns:p14="http://schemas.microsoft.com/office/powerpoint/2010/main" val="3603028818"/>
+        <p14:creationId xmlns:p14="http://schemas.microsoft.com/office/powerpoint/2010/main" val="1464015792"/>
       </p:ext>
     </p:extLst>
   </p:cSld>
@@ -5730,7 +5723,7 @@
           <p:cNvPr id="2" name="Titel 1">
             <a:extLst>
               <a:ext uri="{FF2B5EF4-FFF2-40B4-BE49-F238E27FC236}">
-                <a16:creationId xmlns:a16="http://schemas.microsoft.com/office/drawing/2014/main" id="{BB527B4E-318F-01F3-DA5E-D552C9431BA0}"/>
+                <a16:creationId xmlns:a16="http://schemas.microsoft.com/office/drawing/2014/main" id="{9728D84D-0315-CC40-03E4-0D67C66A8EAA}"/>
               </a:ext>
             </a:extLst>
           </p:cNvPr>
@@ -5748,13 +5741,16 @@
           <a:p>
             <a:r>
               <a:rPr lang="de-DE" dirty="0"/>
-              <a:t>Generalist Robot </a:t>
+              <a:t>Sim-</a:t>
             </a:r>
             <a:r>
               <a:rPr lang="de-DE" dirty="0" err="1"/>
-              <a:t>Policies</a:t>
-            </a:r>
-            <a:endParaRPr lang="de-DE" dirty="0"/>
+              <a:t>to</a:t>
+            </a:r>
+            <a:r>
+              <a:rPr lang="de-DE" dirty="0"/>
+              <a:t>-Real Gap</a:t>
+            </a:r>
           </a:p>
         </p:txBody>
       </p:sp>
@@ -5763,7 +5759,7 @@
           <p:cNvPr id="3" name="Inhaltsplatzhalter 2">
             <a:extLst>
               <a:ext uri="{FF2B5EF4-FFF2-40B4-BE49-F238E27FC236}">
-                <a16:creationId xmlns:a16="http://schemas.microsoft.com/office/drawing/2014/main" id="{0EDD8201-E814-754C-57A9-E0D3326CEC1E}"/>
+                <a16:creationId xmlns:a16="http://schemas.microsoft.com/office/drawing/2014/main" id="{69AFEC59-CB1E-7792-3404-78A3B93E229C}"/>
               </a:ext>
             </a:extLst>
           </p:cNvPr>
@@ -5779,15 +5775,7 @@
           <a:bodyPr/>
           <a:lstStyle/>
           <a:p>
-            <a:r>
-              <a:rPr lang="de-DE" dirty="0"/>
-              <a:t>e.g., </a:t>
-            </a:r>
-            <a:r>
-              <a:rPr lang="de-DE" dirty="0" err="1"/>
-              <a:t>SmolVLA</a:t>
-            </a:r>
-            <a:endParaRPr lang="de-DE" dirty="0"/>
+            <a:endParaRPr lang="de-DE"/>
           </a:p>
         </p:txBody>
       </p:sp>
@@ -5796,7 +5784,7 @@
           <p:cNvPr id="4" name="Foliennummernplatzhalter 3">
             <a:extLst>
               <a:ext uri="{FF2B5EF4-FFF2-40B4-BE49-F238E27FC236}">
-                <a16:creationId xmlns:a16="http://schemas.microsoft.com/office/drawing/2014/main" id="{26BC5031-BD7E-00D2-C81A-AA5111B94CBE}"/>
+                <a16:creationId xmlns:a16="http://schemas.microsoft.com/office/drawing/2014/main" id="{629AC89E-FE0F-BB39-BE49-90F4B5A47D06}"/>
               </a:ext>
             </a:extLst>
           </p:cNvPr>
@@ -5823,7 +5811,7 @@
     </p:spTree>
     <p:extLst>
       <p:ext uri="{BB962C8B-B14F-4D97-AF65-F5344CB8AC3E}">
-        <p14:creationId xmlns:p14="http://schemas.microsoft.com/office/powerpoint/2010/main" val="3427472480"/>
+        <p14:creationId xmlns:p14="http://schemas.microsoft.com/office/powerpoint/2010/main" val="3603028818"/>
       </p:ext>
     </p:extLst>
   </p:cSld>
@@ -5855,7 +5843,7 @@
           <p:cNvPr id="2" name="Titel 1">
             <a:extLst>
               <a:ext uri="{FF2B5EF4-FFF2-40B4-BE49-F238E27FC236}">
-                <a16:creationId xmlns:a16="http://schemas.microsoft.com/office/drawing/2014/main" id="{BDA7BBA6-3E54-57FD-D5B4-A8C70F7360E2}"/>
+                <a16:creationId xmlns:a16="http://schemas.microsoft.com/office/drawing/2014/main" id="{BB527B4E-318F-01F3-DA5E-D552C9431BA0}"/>
               </a:ext>
             </a:extLst>
           </p:cNvPr>
@@ -5873,17 +5861,22 @@
           <a:p>
             <a:r>
               <a:rPr lang="de-DE" dirty="0"/>
-              <a:t>Vision-Language-Action Models</a:t>
-            </a:r>
-          </a:p>
-        </p:txBody>
-      </p:sp>
-      <p:sp>
-        <p:nvSpPr>
-          <p:cNvPr id="6" name="Inhaltsplatzhalter 5">
-            <a:extLst>
-              <a:ext uri="{FF2B5EF4-FFF2-40B4-BE49-F238E27FC236}">
-                <a16:creationId xmlns:a16="http://schemas.microsoft.com/office/drawing/2014/main" id="{96889E58-4E7D-1C17-1621-FA929ACC4D3B}"/>
+              <a:t>Generalist Robot </a:t>
+            </a:r>
+            <a:r>
+              <a:rPr lang="de-DE" dirty="0" err="1"/>
+              <a:t>Policies</a:t>
+            </a:r>
+            <a:endParaRPr lang="de-DE" dirty="0"/>
+          </a:p>
+        </p:txBody>
+      </p:sp>
+      <p:sp>
+        <p:nvSpPr>
+          <p:cNvPr id="3" name="Inhaltsplatzhalter 2">
+            <a:extLst>
+              <a:ext uri="{FF2B5EF4-FFF2-40B4-BE49-F238E27FC236}">
+                <a16:creationId xmlns:a16="http://schemas.microsoft.com/office/drawing/2014/main" id="{0EDD8201-E814-754C-57A9-E0D3326CEC1E}"/>
               </a:ext>
             </a:extLst>
           </p:cNvPr>
@@ -5899,160 +5892,24 @@
           <a:bodyPr/>
           <a:lstStyle/>
           <a:p>
-            <a:pPr marL="0" indent="0">
-              <a:buNone/>
-            </a:pPr>
+            <a:r>
+              <a:rPr lang="de-DE" dirty="0"/>
+              <a:t>e.g., </a:t>
+            </a:r>
             <a:r>
               <a:rPr lang="de-DE" dirty="0" err="1"/>
-              <a:t>Integrating</a:t>
-            </a:r>
-            <a:r>
-              <a:rPr lang="de-DE" dirty="0"/>
-              <a:t> </a:t>
-            </a:r>
-            <a:r>
-              <a:rPr lang="de-DE" dirty="0" err="1"/>
-              <a:t>visual</a:t>
-            </a:r>
-            <a:r>
-              <a:rPr lang="de-DE" dirty="0"/>
-              <a:t> and </a:t>
-            </a:r>
-            <a:r>
-              <a:rPr lang="de-DE" dirty="0" err="1"/>
-              <a:t>textual</a:t>
-            </a:r>
-            <a:r>
-              <a:rPr lang="de-DE" dirty="0"/>
-              <a:t> </a:t>
-            </a:r>
-            <a:r>
-              <a:rPr lang="de-DE" dirty="0" err="1"/>
-              <a:t>inputs</a:t>
-            </a:r>
-            <a:r>
-              <a:rPr lang="de-DE" dirty="0"/>
-              <a:t> </a:t>
-            </a:r>
-            <a:r>
-              <a:rPr lang="de-DE" dirty="0" err="1"/>
-              <a:t>for</a:t>
-            </a:r>
-            <a:r>
-              <a:rPr lang="de-DE" dirty="0"/>
-              <a:t> </a:t>
-            </a:r>
-            <a:r>
-              <a:rPr lang="de-DE" dirty="0" err="1"/>
-              <a:t>policy</a:t>
-            </a:r>
-            <a:r>
-              <a:rPr lang="de-DE" dirty="0"/>
-              <a:t> </a:t>
-            </a:r>
-            <a:r>
-              <a:rPr lang="de-DE" dirty="0" err="1"/>
-              <a:t>learning</a:t>
+              <a:t>SmolVLA</a:t>
             </a:r>
             <a:endParaRPr lang="de-DE" dirty="0"/>
           </a:p>
-          <a:p>
-            <a:pPr marL="0" indent="0">
-              <a:buNone/>
-            </a:pPr>
-            <a:endParaRPr lang="de-DE" dirty="0"/>
-          </a:p>
-          <a:p>
-            <a:r>
-              <a:rPr lang="de-DE" dirty="0"/>
-              <a:t>Vision </a:t>
-            </a:r>
-            <a:r>
-              <a:rPr lang="de-DE" dirty="0" err="1"/>
-              <a:t>encoders</a:t>
-            </a:r>
-            <a:r>
-              <a:rPr lang="de-DE" dirty="0"/>
-              <a:t> (</a:t>
-            </a:r>
-            <a:r>
-              <a:rPr lang="de-DE" dirty="0" err="1"/>
-              <a:t>ResNet</a:t>
-            </a:r>
-            <a:r>
-              <a:rPr lang="de-DE" dirty="0"/>
-              <a:t>, </a:t>
-            </a:r>
-            <a:r>
-              <a:rPr lang="de-DE" dirty="0" err="1"/>
-              <a:t>ViT</a:t>
-            </a:r>
-            <a:r>
-              <a:rPr lang="de-DE" dirty="0"/>
-              <a:t>)</a:t>
-            </a:r>
-          </a:p>
-          <a:p>
-            <a:r>
-              <a:rPr lang="de-DE" dirty="0"/>
-              <a:t>Language </a:t>
-            </a:r>
-            <a:r>
-              <a:rPr lang="de-DE" dirty="0" err="1"/>
-              <a:t>models</a:t>
-            </a:r>
-            <a:endParaRPr lang="de-DE" dirty="0"/>
-          </a:p>
-          <a:p>
-            <a:r>
-              <a:rPr lang="de-DE" dirty="0"/>
-              <a:t>Multimodal </a:t>
-            </a:r>
-            <a:r>
-              <a:rPr lang="de-DE" dirty="0" err="1"/>
-              <a:t>fusion</a:t>
-            </a:r>
-            <a:endParaRPr lang="de-DE" dirty="0"/>
-          </a:p>
-          <a:p>
-            <a:r>
-              <a:rPr lang="de-DE" dirty="0" err="1"/>
-              <a:t>Tokenization</a:t>
-            </a:r>
-            <a:r>
-              <a:rPr lang="de-DE" dirty="0"/>
-              <a:t> </a:t>
-            </a:r>
-            <a:r>
-              <a:rPr lang="de-DE" dirty="0" err="1"/>
-              <a:t>of</a:t>
-            </a:r>
-            <a:r>
-              <a:rPr lang="de-DE" dirty="0"/>
-              <a:t> </a:t>
-            </a:r>
-            <a:r>
-              <a:rPr lang="de-DE" dirty="0" err="1"/>
-              <a:t>sensorimotor</a:t>
-            </a:r>
-            <a:r>
-              <a:rPr lang="de-DE" dirty="0"/>
-              <a:t> </a:t>
-            </a:r>
-            <a:r>
-              <a:rPr lang="de-DE" dirty="0" err="1"/>
-              <a:t>sequences</a:t>
-            </a:r>
-            <a:endParaRPr lang="de-DE" dirty="0"/>
-          </a:p>
-        </p:txBody>
-      </p:sp>
-      <p:sp>
-        <p:nvSpPr>
-          <p:cNvPr id="5" name="Foliennummernplatzhalter 4">
-            <a:extLst>
-              <a:ext uri="{FF2B5EF4-FFF2-40B4-BE49-F238E27FC236}">
-                <a16:creationId xmlns:a16="http://schemas.microsoft.com/office/drawing/2014/main" id="{67471126-BCCE-5A0D-2C01-13F8853CD6C9}"/>
+        </p:txBody>
+      </p:sp>
+      <p:sp>
+        <p:nvSpPr>
+          <p:cNvPr id="4" name="Foliennummernplatzhalter 3">
+            <a:extLst>
+              <a:ext uri="{FF2B5EF4-FFF2-40B4-BE49-F238E27FC236}">
+                <a16:creationId xmlns:a16="http://schemas.microsoft.com/office/drawing/2014/main" id="{26BC5031-BD7E-00D2-C81A-AA5111B94CBE}"/>
               </a:ext>
             </a:extLst>
           </p:cNvPr>
@@ -6079,7 +5936,7 @@
     </p:spTree>
     <p:extLst>
       <p:ext uri="{BB962C8B-B14F-4D97-AF65-F5344CB8AC3E}">
-        <p14:creationId xmlns:p14="http://schemas.microsoft.com/office/powerpoint/2010/main" val="726160561"/>
+        <p14:creationId xmlns:p14="http://schemas.microsoft.com/office/powerpoint/2010/main" val="3427472480"/>
       </p:ext>
     </p:extLst>
   </p:cSld>
@@ -6383,6 +6240,262 @@
       </p:grpSpPr>
       <p:sp>
         <p:nvSpPr>
+          <p:cNvPr id="2" name="Titel 1">
+            <a:extLst>
+              <a:ext uri="{FF2B5EF4-FFF2-40B4-BE49-F238E27FC236}">
+                <a16:creationId xmlns:a16="http://schemas.microsoft.com/office/drawing/2014/main" id="{BDA7BBA6-3E54-57FD-D5B4-A8C70F7360E2}"/>
+              </a:ext>
+            </a:extLst>
+          </p:cNvPr>
+          <p:cNvSpPr>
+            <a:spLocks noGrp="1"/>
+          </p:cNvSpPr>
+          <p:nvPr>
+            <p:ph type="title"/>
+          </p:nvPr>
+        </p:nvSpPr>
+        <p:spPr/>
+        <p:txBody>
+          <a:bodyPr/>
+          <a:lstStyle/>
+          <a:p>
+            <a:r>
+              <a:rPr lang="de-DE" dirty="0"/>
+              <a:t>Vision-Language-Action Models</a:t>
+            </a:r>
+          </a:p>
+        </p:txBody>
+      </p:sp>
+      <p:sp>
+        <p:nvSpPr>
+          <p:cNvPr id="6" name="Inhaltsplatzhalter 5">
+            <a:extLst>
+              <a:ext uri="{FF2B5EF4-FFF2-40B4-BE49-F238E27FC236}">
+                <a16:creationId xmlns:a16="http://schemas.microsoft.com/office/drawing/2014/main" id="{96889E58-4E7D-1C17-1621-FA929ACC4D3B}"/>
+              </a:ext>
+            </a:extLst>
+          </p:cNvPr>
+          <p:cNvSpPr>
+            <a:spLocks noGrp="1"/>
+          </p:cNvSpPr>
+          <p:nvPr>
+            <p:ph idx="1"/>
+          </p:nvPr>
+        </p:nvSpPr>
+        <p:spPr/>
+        <p:txBody>
+          <a:bodyPr/>
+          <a:lstStyle/>
+          <a:p>
+            <a:pPr marL="0" indent="0">
+              <a:buNone/>
+            </a:pPr>
+            <a:r>
+              <a:rPr lang="de-DE" dirty="0" err="1"/>
+              <a:t>Integrating</a:t>
+            </a:r>
+            <a:r>
+              <a:rPr lang="de-DE" dirty="0"/>
+              <a:t> </a:t>
+            </a:r>
+            <a:r>
+              <a:rPr lang="de-DE" dirty="0" err="1"/>
+              <a:t>visual</a:t>
+            </a:r>
+            <a:r>
+              <a:rPr lang="de-DE" dirty="0"/>
+              <a:t> and </a:t>
+            </a:r>
+            <a:r>
+              <a:rPr lang="de-DE" dirty="0" err="1"/>
+              <a:t>textual</a:t>
+            </a:r>
+            <a:r>
+              <a:rPr lang="de-DE" dirty="0"/>
+              <a:t> </a:t>
+            </a:r>
+            <a:r>
+              <a:rPr lang="de-DE" dirty="0" err="1"/>
+              <a:t>inputs</a:t>
+            </a:r>
+            <a:r>
+              <a:rPr lang="de-DE" dirty="0"/>
+              <a:t> </a:t>
+            </a:r>
+            <a:r>
+              <a:rPr lang="de-DE" dirty="0" err="1"/>
+              <a:t>for</a:t>
+            </a:r>
+            <a:r>
+              <a:rPr lang="de-DE" dirty="0"/>
+              <a:t> </a:t>
+            </a:r>
+            <a:r>
+              <a:rPr lang="de-DE" dirty="0" err="1"/>
+              <a:t>policy</a:t>
+            </a:r>
+            <a:r>
+              <a:rPr lang="de-DE" dirty="0"/>
+              <a:t> </a:t>
+            </a:r>
+            <a:r>
+              <a:rPr lang="de-DE" dirty="0" err="1"/>
+              <a:t>learning</a:t>
+            </a:r>
+            <a:endParaRPr lang="de-DE" dirty="0"/>
+          </a:p>
+          <a:p>
+            <a:pPr marL="0" indent="0">
+              <a:buNone/>
+            </a:pPr>
+            <a:endParaRPr lang="de-DE" dirty="0"/>
+          </a:p>
+          <a:p>
+            <a:r>
+              <a:rPr lang="de-DE" dirty="0"/>
+              <a:t>Vision </a:t>
+            </a:r>
+            <a:r>
+              <a:rPr lang="de-DE" dirty="0" err="1"/>
+              <a:t>encoders</a:t>
+            </a:r>
+            <a:r>
+              <a:rPr lang="de-DE" dirty="0"/>
+              <a:t> (</a:t>
+            </a:r>
+            <a:r>
+              <a:rPr lang="de-DE" dirty="0" err="1"/>
+              <a:t>ResNet</a:t>
+            </a:r>
+            <a:r>
+              <a:rPr lang="de-DE" dirty="0"/>
+              <a:t>, </a:t>
+            </a:r>
+            <a:r>
+              <a:rPr lang="de-DE" dirty="0" err="1"/>
+              <a:t>ViT</a:t>
+            </a:r>
+            <a:r>
+              <a:rPr lang="de-DE" dirty="0"/>
+              <a:t>)</a:t>
+            </a:r>
+          </a:p>
+          <a:p>
+            <a:r>
+              <a:rPr lang="de-DE" dirty="0"/>
+              <a:t>Language </a:t>
+            </a:r>
+            <a:r>
+              <a:rPr lang="de-DE" dirty="0" err="1"/>
+              <a:t>models</a:t>
+            </a:r>
+            <a:endParaRPr lang="de-DE" dirty="0"/>
+          </a:p>
+          <a:p>
+            <a:r>
+              <a:rPr lang="de-DE" dirty="0"/>
+              <a:t>Multimodal </a:t>
+            </a:r>
+            <a:r>
+              <a:rPr lang="de-DE" dirty="0" err="1"/>
+              <a:t>fusion</a:t>
+            </a:r>
+            <a:endParaRPr lang="de-DE" dirty="0"/>
+          </a:p>
+          <a:p>
+            <a:r>
+              <a:rPr lang="de-DE" dirty="0" err="1"/>
+              <a:t>Tokenization</a:t>
+            </a:r>
+            <a:r>
+              <a:rPr lang="de-DE" dirty="0"/>
+              <a:t> </a:t>
+            </a:r>
+            <a:r>
+              <a:rPr lang="de-DE" dirty="0" err="1"/>
+              <a:t>of</a:t>
+            </a:r>
+            <a:r>
+              <a:rPr lang="de-DE" dirty="0"/>
+              <a:t> </a:t>
+            </a:r>
+            <a:r>
+              <a:rPr lang="de-DE" dirty="0" err="1"/>
+              <a:t>sensorimotor</a:t>
+            </a:r>
+            <a:r>
+              <a:rPr lang="de-DE" dirty="0"/>
+              <a:t> </a:t>
+            </a:r>
+            <a:r>
+              <a:rPr lang="de-DE" dirty="0" err="1"/>
+              <a:t>sequences</a:t>
+            </a:r>
+            <a:endParaRPr lang="de-DE" dirty="0"/>
+          </a:p>
+        </p:txBody>
+      </p:sp>
+      <p:sp>
+        <p:nvSpPr>
+          <p:cNvPr id="5" name="Foliennummernplatzhalter 4">
+            <a:extLst>
+              <a:ext uri="{FF2B5EF4-FFF2-40B4-BE49-F238E27FC236}">
+                <a16:creationId xmlns:a16="http://schemas.microsoft.com/office/drawing/2014/main" id="{67471126-BCCE-5A0D-2C01-13F8853CD6C9}"/>
+              </a:ext>
+            </a:extLst>
+          </p:cNvPr>
+          <p:cNvSpPr>
+            <a:spLocks noGrp="1"/>
+          </p:cNvSpPr>
+          <p:nvPr>
+            <p:ph type="sldNum" sz="quarter" idx="12"/>
+          </p:nvPr>
+        </p:nvSpPr>
+        <p:spPr/>
+        <p:txBody>
+          <a:bodyPr/>
+          <a:lstStyle/>
+          <a:p>
+            <a:fld id="{08C366F5-AFAD-49CB-854A-9D9E238FCA13}" type="slidenum">
+              <a:rPr lang="en-GB" smtClean="0"/>
+              <a:t>20</a:t>
+            </a:fld>
+            <a:endParaRPr lang="en-GB"/>
+          </a:p>
+        </p:txBody>
+      </p:sp>
+    </p:spTree>
+    <p:extLst>
+      <p:ext uri="{BB962C8B-B14F-4D97-AF65-F5344CB8AC3E}">
+        <p14:creationId xmlns:p14="http://schemas.microsoft.com/office/powerpoint/2010/main" val="726160561"/>
+      </p:ext>
+    </p:extLst>
+  </p:cSld>
+  <p:clrMapOvr>
+    <a:masterClrMapping/>
+  </p:clrMapOvr>
+</p:sld>
+</file>
+
+<file path=ppt/slides/slide21.xml><?xml version="1.0" encoding="utf-8"?>
+<p:sld xmlns:a="http://schemas.openxmlformats.org/drawingml/2006/main" xmlns:r="http://schemas.openxmlformats.org/officeDocument/2006/relationships" xmlns:p="http://schemas.openxmlformats.org/presentationml/2006/main">
+  <p:cSld>
+    <p:spTree>
+      <p:nvGrpSpPr>
+        <p:cNvPr id="1" name=""/>
+        <p:cNvGrpSpPr/>
+        <p:nvPr/>
+      </p:nvGrpSpPr>
+      <p:grpSpPr>
+        <a:xfrm>
+          <a:off x="0" y="0"/>
+          <a:ext cx="0" cy="0"/>
+          <a:chOff x="0" y="0"/>
+          <a:chExt cx="0" cy="0"/>
+        </a:xfrm>
+      </p:grpSpPr>
+      <p:sp>
+        <p:nvSpPr>
           <p:cNvPr id="7" name="Title 6">
             <a:extLst>
               <a:ext uri="{FF2B5EF4-FFF2-40B4-BE49-F238E27FC236}">
@@ -6488,7 +6601,7 @@
           <a:p>
             <a:fld id="{C48B675A-2084-C34A-84F6-1B6A8516A5F3}" type="slidenum">
               <a:rPr lang="en-DE" smtClean="0"/>
-              <a:t>20</a:t>
+              <a:t>21</a:t>
             </a:fld>
             <a:endParaRPr lang="en-DE"/>
           </a:p>
@@ -6771,7 +6884,7 @@
 </p:sld>
 </file>
 
-<file path=ppt/slides/slide21.xml><?xml version="1.0" encoding="utf-8"?>
+<file path=ppt/slides/slide22.xml><?xml version="1.0" encoding="utf-8"?>
 <p:sld xmlns:a="http://schemas.openxmlformats.org/drawingml/2006/main" xmlns:r="http://schemas.openxmlformats.org/officeDocument/2006/relationships" xmlns:p="http://schemas.openxmlformats.org/presentationml/2006/main">
   <p:cSld>
     <p:spTree>
@@ -6904,7 +7017,7 @@
           <a:p>
             <a:fld id="{08C366F5-AFAD-49CB-854A-9D9E238FCA13}" type="slidenum">
               <a:rPr lang="en-GB" smtClean="0"/>
-              <a:t>21</a:t>
+              <a:t>22</a:t>
             </a:fld>
             <a:endParaRPr lang="en-GB"/>
           </a:p>
